--- a/lessons/3-4/slides.pptx
+++ b/lessons/3-4/slides.pptx
@@ -10684,7 +10684,7 @@
       </p:sp>
       <p:sp>
         <p:nvSpPr>
-          <p:cNvPr id="20" name="Shape 18"/>
+          <p:cNvPr id="20" name="Text 18"/>
           <p:cNvSpPr/>
           <p:nvPr/>
         </p:nvSpPr>
@@ -10705,33 +10705,7 @@
             <a:solidFill>
               <a:srgbClr val="D6DBDF"/>
             </a:solidFill>
-            <a:prstDash val="solid"/>
           </a:ln>
-          <a:effectLst>
-            <a:outerShdw sx="100000" sy="100000" kx="0" ky="0" algn="bl" rotWithShape="0" blurRad="50800" dist="12700" dir="5400000">
-              <a:srgbClr val="1C2E42">
-                <a:alpha val="10000"/>
-              </a:srgbClr>
-            </a:outerShdw>
-          </a:effectLst>
-        </p:spPr>
-      </p:sp>
-      <p:sp>
-        <p:nvSpPr>
-          <p:cNvPr id="21" name="Text 19"/>
-          <p:cNvSpPr/>
-          <p:nvPr/>
-        </p:nvSpPr>
-        <p:spPr>
-          <a:xfrm>
-            <a:off x="685800" y="1481328"/>
-            <a:ext cx="1447800" cy="384048"/>
-          </a:xfrm>
-          <a:prstGeom prst="rect">
-            <a:avLst/>
-          </a:prstGeom>
-          <a:noFill/>
-          <a:ln/>
         </p:spPr>
         <p:txBody>
           <a:bodyPr wrap="square" rtlCol="0" anchor="ctr"/>
@@ -10741,7 +10715,7 @@
               <a:buNone/>
             </a:pPr>
             <a:r>
-              <a:rPr lang="en-US" sz="900" dirty="0">
+              <a:rPr lang="en-US" sz="900" b="1" dirty="0">
                 <a:solidFill>
                   <a:srgbClr val="17324D"/>
                 </a:solidFill>
@@ -10757,7 +10731,7 @@
       </p:sp>
       <p:sp>
         <p:nvSpPr>
-          <p:cNvPr id="22" name="Shape 20"/>
+          <p:cNvPr id="21" name="Text 19"/>
           <p:cNvSpPr/>
           <p:nvPr/>
         </p:nvSpPr>
@@ -10778,33 +10752,7 @@
             <a:solidFill>
               <a:srgbClr val="D6DBDF"/>
             </a:solidFill>
-            <a:prstDash val="solid"/>
           </a:ln>
-          <a:effectLst>
-            <a:outerShdw sx="100000" sy="100000" kx="0" ky="0" algn="bl" rotWithShape="0" blurRad="50800" dist="12700" dir="5400000">
-              <a:srgbClr val="1C2E42">
-                <a:alpha val="10000"/>
-              </a:srgbClr>
-            </a:outerShdw>
-          </a:effectLst>
-        </p:spPr>
-      </p:sp>
-      <p:sp>
-        <p:nvSpPr>
-          <p:cNvPr id="23" name="Text 21"/>
-          <p:cNvSpPr/>
-          <p:nvPr/>
-        </p:nvSpPr>
-        <p:spPr>
-          <a:xfrm>
-            <a:off x="2453640" y="1481328"/>
-            <a:ext cx="1447800" cy="384048"/>
-          </a:xfrm>
-          <a:prstGeom prst="rect">
-            <a:avLst/>
-          </a:prstGeom>
-          <a:noFill/>
-          <a:ln/>
         </p:spPr>
         <p:txBody>
           <a:bodyPr wrap="square" rtlCol="0" anchor="ctr"/>
@@ -10814,7 +10762,7 @@
               <a:buNone/>
             </a:pPr>
             <a:r>
-              <a:rPr lang="en-US" sz="900" dirty="0">
+              <a:rPr lang="en-US" sz="900" b="1" dirty="0">
                 <a:solidFill>
                   <a:srgbClr val="17324D"/>
                 </a:solidFill>
@@ -10830,7 +10778,7 @@
       </p:sp>
       <p:sp>
         <p:nvSpPr>
-          <p:cNvPr id="24" name="Shape 22"/>
+          <p:cNvPr id="22" name="Text 20"/>
           <p:cNvSpPr/>
           <p:nvPr/>
         </p:nvSpPr>
@@ -10851,33 +10799,7 @@
             <a:solidFill>
               <a:srgbClr val="D6DBDF"/>
             </a:solidFill>
-            <a:prstDash val="solid"/>
           </a:ln>
-          <a:effectLst>
-            <a:outerShdw sx="100000" sy="100000" kx="0" ky="0" algn="bl" rotWithShape="0" blurRad="50800" dist="12700" dir="5400000">
-              <a:srgbClr val="1C2E42">
-                <a:alpha val="10000"/>
-              </a:srgbClr>
-            </a:outerShdw>
-          </a:effectLst>
-        </p:spPr>
-      </p:sp>
-      <p:sp>
-        <p:nvSpPr>
-          <p:cNvPr id="25" name="Text 23"/>
-          <p:cNvSpPr/>
-          <p:nvPr/>
-        </p:nvSpPr>
-        <p:spPr>
-          <a:xfrm>
-            <a:off x="4221480" y="1481328"/>
-            <a:ext cx="1447800" cy="384048"/>
-          </a:xfrm>
-          <a:prstGeom prst="rect">
-            <a:avLst/>
-          </a:prstGeom>
-          <a:noFill/>
-          <a:ln/>
         </p:spPr>
         <p:txBody>
           <a:bodyPr wrap="square" rtlCol="0" anchor="ctr"/>
@@ -10887,7 +10809,7 @@
               <a:buNone/>
             </a:pPr>
             <a:r>
-              <a:rPr lang="en-US" sz="900" dirty="0">
+              <a:rPr lang="en-US" sz="900" b="1" dirty="0">
                 <a:solidFill>
                   <a:srgbClr val="17324D"/>
                 </a:solidFill>
@@ -10903,7 +10825,7 @@
       </p:sp>
       <p:sp>
         <p:nvSpPr>
-          <p:cNvPr id="26" name="Shape 24"/>
+          <p:cNvPr id="23" name="Text 21"/>
           <p:cNvSpPr/>
           <p:nvPr/>
         </p:nvSpPr>
@@ -10924,33 +10846,7 @@
             <a:solidFill>
               <a:srgbClr val="D6DBDF"/>
             </a:solidFill>
-            <a:prstDash val="solid"/>
           </a:ln>
-          <a:effectLst>
-            <a:outerShdw sx="100000" sy="100000" kx="0" ky="0" algn="bl" rotWithShape="0" blurRad="50800" dist="12700" dir="5400000">
-              <a:srgbClr val="1C2E42">
-                <a:alpha val="10000"/>
-              </a:srgbClr>
-            </a:outerShdw>
-          </a:effectLst>
-        </p:spPr>
-      </p:sp>
-      <p:sp>
-        <p:nvSpPr>
-          <p:cNvPr id="27" name="Text 25"/>
-          <p:cNvSpPr/>
-          <p:nvPr/>
-        </p:nvSpPr>
-        <p:spPr>
-          <a:xfrm>
-            <a:off x="685800" y="1975104"/>
-            <a:ext cx="1447800" cy="384048"/>
-          </a:xfrm>
-          <a:prstGeom prst="rect">
-            <a:avLst/>
-          </a:prstGeom>
-          <a:noFill/>
-          <a:ln/>
         </p:spPr>
         <p:txBody>
           <a:bodyPr wrap="square" rtlCol="0" anchor="ctr"/>
@@ -10960,7 +10856,7 @@
               <a:buNone/>
             </a:pPr>
             <a:r>
-              <a:rPr lang="en-US" sz="900" dirty="0">
+              <a:rPr lang="en-US" sz="900" b="1" dirty="0">
                 <a:solidFill>
                   <a:srgbClr val="17324D"/>
                 </a:solidFill>
@@ -10976,7 +10872,7 @@
       </p:sp>
       <p:sp>
         <p:nvSpPr>
-          <p:cNvPr id="28" name="Shape 26"/>
+          <p:cNvPr id="24" name="Shape 22"/>
           <p:cNvSpPr/>
           <p:nvPr/>
         </p:nvSpPr>
@@ -11010,7 +10906,7 @@
       </p:sp>
       <p:sp>
         <p:nvSpPr>
-          <p:cNvPr id="29" name="Text 27"/>
+          <p:cNvPr id="25" name="Text 23"/>
           <p:cNvSpPr/>
           <p:nvPr/>
         </p:nvSpPr>
@@ -11051,7 +10947,7 @@
       </p:sp>
       <p:sp>
         <p:nvSpPr>
-          <p:cNvPr id="30" name="Shape 28"/>
+          <p:cNvPr id="26" name="Shape 24"/>
           <p:cNvSpPr/>
           <p:nvPr/>
         </p:nvSpPr>
@@ -11085,7 +10981,7 @@
       </p:sp>
       <p:sp>
         <p:nvSpPr>
-          <p:cNvPr id="31" name="Text 29"/>
+          <p:cNvPr id="27" name="Text 25"/>
           <p:cNvSpPr/>
           <p:nvPr/>
         </p:nvSpPr>
@@ -11126,7 +11022,7 @@
       </p:sp>
       <p:sp>
         <p:nvSpPr>
-          <p:cNvPr id="32" name="Shape 30"/>
+          <p:cNvPr id="28" name="Shape 26"/>
           <p:cNvSpPr/>
           <p:nvPr/>
         </p:nvSpPr>
@@ -11160,7 +11056,7 @@
       </p:sp>
       <p:sp>
         <p:nvSpPr>
-          <p:cNvPr id="33" name="Text 31"/>
+          <p:cNvPr id="29" name="Text 27"/>
           <p:cNvSpPr/>
           <p:nvPr/>
         </p:nvSpPr>
@@ -11201,7 +11097,7 @@
       </p:sp>
       <p:sp>
         <p:nvSpPr>
-          <p:cNvPr id="34" name="Text 32"/>
+          <p:cNvPr id="30" name="Text 28"/>
           <p:cNvSpPr/>
           <p:nvPr/>
         </p:nvSpPr>
@@ -11240,7 +11136,7 @@
       </p:sp>
       <p:sp>
         <p:nvSpPr>
-          <p:cNvPr id="35" name="Shape 33"/>
+          <p:cNvPr id="31" name="Shape 29"/>
           <p:cNvSpPr/>
           <p:nvPr/>
         </p:nvSpPr>
@@ -11263,7 +11159,7 @@
       </p:sp>
       <p:sp>
         <p:nvSpPr>
-          <p:cNvPr id="36" name="Shape 34"/>
+          <p:cNvPr id="32" name="Shape 30"/>
           <p:cNvSpPr/>
           <p:nvPr/>
         </p:nvSpPr>
@@ -11286,7 +11182,7 @@
       </p:sp>
       <p:sp>
         <p:nvSpPr>
-          <p:cNvPr id="37" name="Shape 35"/>
+          <p:cNvPr id="33" name="Shape 31"/>
           <p:cNvSpPr/>
           <p:nvPr/>
         </p:nvSpPr>
@@ -11309,7 +11205,7 @@
       </p:sp>
       <p:sp>
         <p:nvSpPr>
-          <p:cNvPr id="38" name="Shape 36"/>
+          <p:cNvPr id="34" name="Shape 32"/>
           <p:cNvSpPr/>
           <p:nvPr/>
         </p:nvSpPr>
@@ -11332,7 +11228,7 @@
       </p:sp>
       <p:sp>
         <p:nvSpPr>
-          <p:cNvPr id="39" name="Shape 37"/>
+          <p:cNvPr id="35" name="Shape 33"/>
           <p:cNvSpPr/>
           <p:nvPr/>
         </p:nvSpPr>

--- a/lessons/3-4/slides.pptx
+++ b/lessons/3-4/slides.pptx
@@ -2495,7 +2495,7 @@
                 <a:ea typeface="Outfit" pitchFamily="34" charset="-122"/>
                 <a:cs typeface="Outfit" pitchFamily="34" charset="-120"/>
               </a:rPr>
-              <a:t>6.RP.3</a:t>
+              <a:t>6.AT.3</a:t>
             </a:r>
             <a:endParaRPr lang="en-US" sz="1000" dirty="0"/>
           </a:p>
@@ -3218,7 +3218,7 @@
                 <a:ea typeface="Outfit" pitchFamily="34" charset="-122"/>
                 <a:cs typeface="Outfit" pitchFamily="34" charset="-120"/>
               </a:rPr>
-              <a:t>6.RP.3</a:t>
+              <a:t>6.AT.3</a:t>
             </a:r>
             <a:endParaRPr lang="en-US" sz="900" dirty="0"/>
           </a:p>
@@ -4328,7 +4328,7 @@
                 <a:ea typeface="Outfit" pitchFamily="34" charset="-122"/>
                 <a:cs typeface="Outfit" pitchFamily="34" charset="-120"/>
               </a:rPr>
-              <a:t>6.RP.3</a:t>
+              <a:t>6.AT.3</a:t>
             </a:r>
             <a:endParaRPr lang="en-US" sz="900" dirty="0"/>
           </a:p>
@@ -5664,7 +5664,7 @@
                 <a:ea typeface="Outfit" pitchFamily="34" charset="-122"/>
                 <a:cs typeface="Outfit" pitchFamily="34" charset="-120"/>
               </a:rPr>
-              <a:t>6.RP.3</a:t>
+              <a:t>6.AT.3</a:t>
             </a:r>
             <a:endParaRPr lang="en-US" sz="900" dirty="0"/>
           </a:p>
@@ -6958,7 +6958,7 @@
                 <a:ea typeface="Outfit" pitchFamily="34" charset="-122"/>
                 <a:cs typeface="Outfit" pitchFamily="34" charset="-120"/>
               </a:rPr>
-              <a:t>6.RP.3</a:t>
+              <a:t>6.AT.3</a:t>
             </a:r>
             <a:endParaRPr lang="en-US" sz="900" dirty="0"/>
           </a:p>
@@ -8020,7 +8020,7 @@
                 <a:ea typeface="Outfit" pitchFamily="34" charset="-122"/>
                 <a:cs typeface="Outfit" pitchFamily="34" charset="-120"/>
               </a:rPr>
-              <a:t>6.RP.3</a:t>
+              <a:t>6.AT.3</a:t>
             </a:r>
             <a:endParaRPr lang="en-US" sz="900" dirty="0"/>
           </a:p>
@@ -8985,7 +8985,7 @@
                 <a:ea typeface="Outfit" pitchFamily="34" charset="-122"/>
                 <a:cs typeface="Outfit" pitchFamily="34" charset="-120"/>
               </a:rPr>
-              <a:t>6.RP.3</a:t>
+              <a:t>6.AT.3</a:t>
             </a:r>
             <a:endParaRPr lang="en-US" sz="900" dirty="0"/>
           </a:p>
@@ -9902,7 +9902,7 @@
                 <a:ea typeface="Outfit" pitchFamily="34" charset="-122"/>
                 <a:cs typeface="Outfit" pitchFamily="34" charset="-120"/>
               </a:rPr>
-              <a:t>6.RP.3</a:t>
+              <a:t>6.AT.3</a:t>
             </a:r>
             <a:endParaRPr lang="en-US" sz="900" dirty="0"/>
           </a:p>
@@ -11030,7 +11030,7 @@
                 <a:ea typeface="Outfit" pitchFamily="34" charset="-122"/>
                 <a:cs typeface="Outfit" pitchFamily="34" charset="-120"/>
               </a:rPr>
-              <a:t>6.RP.3</a:t>
+              <a:t>6.AT.3</a:t>
             </a:r>
             <a:endParaRPr lang="en-US" sz="900" dirty="0"/>
           </a:p>
@@ -12463,7 +12463,7 @@
                 <a:ea typeface="Outfit" pitchFamily="34" charset="-122"/>
                 <a:cs typeface="Outfit" pitchFamily="34" charset="-120"/>
               </a:rPr>
-              <a:t>6.RP.3</a:t>
+              <a:t>6.AT.3</a:t>
             </a:r>
             <a:endParaRPr lang="en-US" sz="900" dirty="0"/>
           </a:p>
@@ -13277,7 +13277,7 @@
                 <a:ea typeface="Outfit" pitchFamily="34" charset="-122"/>
                 <a:cs typeface="Outfit" pitchFamily="34" charset="-120"/>
               </a:rPr>
-              <a:t>6.RP.3</a:t>
+              <a:t>6.AT.3</a:t>
             </a:r>
             <a:endParaRPr lang="en-US" sz="900" dirty="0"/>
           </a:p>
@@ -14290,7 +14290,7 @@
                 <a:ea typeface="Outfit" pitchFamily="34" charset="-122"/>
                 <a:cs typeface="Outfit" pitchFamily="34" charset="-120"/>
               </a:rPr>
-              <a:t>6.RP.3</a:t>
+              <a:t>6.AT.3</a:t>
             </a:r>
             <a:endParaRPr lang="en-US" sz="900" dirty="0"/>
           </a:p>
@@ -15350,7 +15350,7 @@
                 <a:ea typeface="Outfit" pitchFamily="34" charset="-122"/>
                 <a:cs typeface="Outfit" pitchFamily="34" charset="-120"/>
               </a:rPr>
-              <a:t>6.RP.3</a:t>
+              <a:t>6.AT.3</a:t>
             </a:r>
             <a:endParaRPr lang="en-US" sz="900" dirty="0"/>
           </a:p>
@@ -16410,7 +16410,7 @@
                 <a:ea typeface="Outfit" pitchFamily="34" charset="-122"/>
                 <a:cs typeface="Outfit" pitchFamily="34" charset="-120"/>
               </a:rPr>
-              <a:t>6.RP.3</a:t>
+              <a:t>6.AT.3</a:t>
             </a:r>
             <a:endParaRPr lang="en-US" sz="900" dirty="0"/>
           </a:p>
@@ -17470,7 +17470,7 @@
                 <a:ea typeface="Outfit" pitchFamily="34" charset="-122"/>
                 <a:cs typeface="Outfit" pitchFamily="34" charset="-120"/>
               </a:rPr>
-              <a:t>6.RP.3</a:t>
+              <a:t>6.AT.3</a:t>
             </a:r>
             <a:endParaRPr lang="en-US" sz="900" dirty="0"/>
           </a:p>
@@ -18458,7 +18458,7 @@
                 <a:ea typeface="Outfit" pitchFamily="34" charset="-122"/>
                 <a:cs typeface="Outfit" pitchFamily="34" charset="-120"/>
               </a:rPr>
-              <a:t>6.RP.3</a:t>
+              <a:t>6.AT.3</a:t>
             </a:r>
             <a:endParaRPr lang="en-US" sz="900" dirty="0"/>
           </a:p>
@@ -20396,7 +20396,7 @@
                 <a:ea typeface="Outfit" pitchFamily="34" charset="-122"/>
                 <a:cs typeface="Outfit" pitchFamily="34" charset="-120"/>
               </a:rPr>
-              <a:t>6.RP.3</a:t>
+              <a:t>6.AT.3</a:t>
             </a:r>
             <a:endParaRPr lang="en-US" sz="900" dirty="0"/>
           </a:p>

--- a/lessons/3-4/slides.pptx
+++ b/lessons/3-4/slides.pptx
@@ -694,7 +694,7 @@
           <a:p>
             <a:r>
               <a:rPr lang="en-US" dirty="0"/>
-              <a:t>Answer key — 3 × 4 = 12 (multiply, don't add)</a:t>
+              <a:t>Answer key — The ordered pairs should be (2, 1), (4, 2), (6, 3) — cookies go on x and milk on y, matching the table's column order.</a:t>
             </a:r>
             <a:endParaRPr lang="en-US" dirty="0"/>
           </a:p>
@@ -2452,7 +2452,7 @@
                 <a:ea typeface="Outfit" pitchFamily="34" charset="-122"/>
                 <a:cs typeface="Outfit" pitchFamily="34" charset="-120"/>
               </a:rPr>
-              <a:t>Equivalent Ratios</a:t>
+              <a:t>Graph Ratio Tables</a:t>
             </a:r>
             <a:endParaRPr lang="en-US" sz="3000" dirty="0"/>
           </a:p>
@@ -2495,7 +2495,7 @@
                 <a:ea typeface="Outfit" pitchFamily="34" charset="-122"/>
                 <a:cs typeface="Outfit" pitchFamily="34" charset="-120"/>
               </a:rPr>
-              <a:t>6.AT.3</a:t>
+              <a:t>6.AT.3a</a:t>
             </a:r>
             <a:endParaRPr lang="en-US" sz="1000" dirty="0"/>
           </a:p>
@@ -2534,7 +2534,7 @@
                 <a:ea typeface="Hanken Grotesk" pitchFamily="34" charset="-122"/>
                 <a:cs typeface="Hanken Grotesk" pitchFamily="34" charset="-120"/>
               </a:rPr>
-              <a:t>Unit 3  ·  Lesson 3-4</a:t>
+              <a:t>Unit 3  ·  Lesson 3-3</a:t>
             </a:r>
             <a:endParaRPr lang="en-US" sz="1000" dirty="0"/>
           </a:p>
@@ -2919,7 +2919,7 @@
                 <a:ea typeface="Hanken Grotesk" pitchFamily="34" charset="-122"/>
                 <a:cs typeface="Hanken Grotesk" pitchFamily="34" charset="-120"/>
               </a:rPr>
-              <a:t>I can find and check equivalent ratios using multiplication and division.</a:t>
+              <a:t>I can graph the values from a ratio table as points on the coordinate plane.</a:t>
             </a:r>
             <a:endParaRPr lang="en-US" sz="1100" dirty="0"/>
           </a:p>
@@ -3045,7 +3045,7 @@
                 <a:ea typeface="Hanken Grotesk" pitchFamily="34" charset="-122"/>
                 <a:cs typeface="Hanken Grotesk" pitchFamily="34" charset="-120"/>
               </a:rPr>
-              <a:t>I can explain my reasoning using the words equivalent ratios, rate, proportion, and simplify.</a:t>
+              <a:t>I can explain my graph using the words coordinate plane, ordered pair, origin, and proportional.</a:t>
             </a:r>
             <a:endParaRPr lang="en-US" sz="1050" dirty="0"/>
           </a:p>
@@ -3218,7 +3218,7 @@
                 <a:ea typeface="Outfit" pitchFamily="34" charset="-122"/>
                 <a:cs typeface="Outfit" pitchFamily="34" charset="-120"/>
               </a:rPr>
-              <a:t>6.AT.3</a:t>
+              <a:t>6.AT.3a</a:t>
             </a:r>
             <a:endParaRPr lang="en-US" sz="900" dirty="0"/>
           </a:p>
@@ -3437,7 +3437,7 @@
                 <a:ea typeface="Hanken Grotesk" pitchFamily="34" charset="-122"/>
                 <a:cs typeface="Hanken Grotesk" pitchFamily="34" charset="-120"/>
               </a:rPr>
-              <a:t>Reveal Math Grade 6  ·  Unit 3  ·  Lesson 3-4</a:t>
+              <a:t>Reveal Math Grade 6  ·  Unit 3  ·  Lesson 3-3</a:t>
             </a:r>
             <a:endParaRPr lang="en-US" sz="750" dirty="0"/>
           </a:p>
@@ -3549,7 +3549,7 @@
                 <a:ea typeface="Outfit" pitchFamily="34" charset="-122"/>
                 <a:cs typeface="Outfit" pitchFamily="34" charset="-120"/>
               </a:rPr>
-              <a:t>Chef Montoya's recipe calls for 3 cups of tomatoes for every 2 cups of broth. Complete the ratio table to help her scale the recipe.</a:t>
+              <a:t>The ratio table shows sundaes to ounces of chocolate sauce (1 sundae = 2 oz). Plot each ordered pair on the coordinate grid.</a:t>
             </a:r>
             <a:endParaRPr lang="en-US" sz="1050" dirty="0"/>
           </a:p>
@@ -4040,7 +4040,7 @@
                 <a:ea typeface="Hanken Grotesk" pitchFamily="34" charset="-122"/>
                 <a:cs typeface="Hanken Grotesk" pitchFamily="34" charset="-120"/>
               </a:rPr>
-              <a:t>Looking at the tomatoes-to-broth table (3:2, 6:4, 9:6, 12:8), how can you PROVE these ratios are all equivalent?</a:t>
+              <a:t>After plotting (1,2), (2,4), (3,6)... what pattern do you notice, and how does it show the chocolate-sauce ratio?</a:t>
             </a:r>
             <a:endParaRPr lang="en-US" sz="1000" dirty="0"/>
           </a:p>
@@ -4328,7 +4328,7 @@
                 <a:ea typeface="Outfit" pitchFamily="34" charset="-122"/>
                 <a:cs typeface="Outfit" pitchFamily="34" charset="-120"/>
               </a:rPr>
-              <a:t>6.AT.3</a:t>
+              <a:t>6.AT.3a</a:t>
             </a:r>
             <a:endParaRPr lang="en-US" sz="900" dirty="0"/>
           </a:p>
@@ -4547,7 +4547,7 @@
                 <a:ea typeface="Hanken Grotesk" pitchFamily="34" charset="-122"/>
                 <a:cs typeface="Hanken Grotesk" pitchFamily="34" charset="-120"/>
               </a:rPr>
-              <a:t>Reveal Math Grade 6  ·  Unit 3  ·  Lesson 3-4</a:t>
+              <a:t>Reveal Math Grade 6  ·  Unit 3  ·  Lesson 3-3</a:t>
             </a:r>
             <a:endParaRPr lang="en-US" sz="750" dirty="0"/>
           </a:p>
@@ -4702,7 +4702,7 @@
                 <a:ea typeface="Outfit" pitchFamily="34" charset="-122"/>
                 <a:cs typeface="Outfit" pitchFamily="34" charset="-120"/>
               </a:rPr>
-              <a:t>Find Marcus's Mistake</a:t>
+              <a:t>Find Jada's Mistake</a:t>
             </a:r>
             <a:endParaRPr lang="en-US" sz="1100" dirty="0"/>
           </a:p>
@@ -4867,7 +4867,7 @@
                 <a:ea typeface="Hanken Grotesk" pitchFamily="34" charset="-122"/>
                 <a:cs typeface="Hanken Grotesk" pitchFamily="34" charset="-120"/>
               </a:rPr>
-              <a:t>Set up the ratio:  </a:t>
+              <a:t>Read the ratio table:  </a:t>
             </a:r>
             <a:pPr indent="0" marL="0">
               <a:buNone/>
@@ -4881,7 +4881,7 @@
                 <a:ea typeface="Courier New" pitchFamily="34" charset="-122"/>
                 <a:cs typeface="Courier New" pitchFamily="34" charset="-120"/>
               </a:rPr>
-              <a:t>3 cups : 5 cups = ? : 20 cups</a:t>
+              <a:t>Cookies: 2, 4, 6 | Cups of milk: 1, 2, 3</a:t>
             </a:r>
             <a:endParaRPr lang="en-US" sz="950" dirty="0"/>
           </a:p>
@@ -4934,7 +4934,7 @@
                 <a:ea typeface="Hanken Grotesk" pitchFamily="34" charset="-122"/>
                 <a:cs typeface="Hanken Grotesk" pitchFamily="34" charset="-120"/>
               </a:rPr>
-              <a:t>Find the multiplier:  </a:t>
+              <a:t>Write ordered pairs:  </a:t>
             </a:r>
             <a:pPr indent="0" marL="0">
               <a:buNone/>
@@ -4948,7 +4948,7 @@
                 <a:ea typeface="Courier New" pitchFamily="34" charset="-122"/>
                 <a:cs typeface="Courier New" pitchFamily="34" charset="-120"/>
               </a:rPr>
-              <a:t>20 ÷ 5 = 4</a:t>
+              <a:t>(1, 2), (2, 4), (3, 6)</a:t>
             </a:r>
             <a:endParaRPr lang="en-US" sz="950" dirty="0"/>
           </a:p>
@@ -5001,7 +5001,7 @@
                 <a:ea typeface="Hanken Grotesk" pitchFamily="34" charset="-122"/>
                 <a:cs typeface="Hanken Grotesk" pitchFamily="34" charset="-120"/>
               </a:rPr>
-              <a:t>Apply to both parts:  </a:t>
+              <a:t>Plot the points:  </a:t>
             </a:r>
             <a:pPr indent="0" marL="0">
               <a:buNone/>
@@ -5015,7 +5015,7 @@
                 <a:ea typeface="Courier New" pitchFamily="34" charset="-122"/>
                 <a:cs typeface="Courier New" pitchFamily="34" charset="-120"/>
               </a:rPr>
-              <a:t>3 + 4 = 7</a:t>
+              <a:t>Plotted (1,2), (2,4), (3,6) on the grid</a:t>
             </a:r>
             <a:endParaRPr lang="en-US" sz="950" dirty="0"/>
           </a:p>
@@ -5068,7 +5068,7 @@
                 <a:ea typeface="Hanken Grotesk" pitchFamily="34" charset="-122"/>
                 <a:cs typeface="Hanken Grotesk" pitchFamily="34" charset="-120"/>
               </a:rPr>
-              <a:t>Answer:  </a:t>
+              <a:t>Conclusion:  </a:t>
             </a:r>
             <a:pPr indent="0" marL="0">
               <a:buNone/>
@@ -5082,7 +5082,7 @@
                 <a:ea typeface="Courier New" pitchFamily="34" charset="-122"/>
                 <a:cs typeface="Courier New" pitchFamily="34" charset="-120"/>
               </a:rPr>
-              <a:t>7 cups : 20 cups</a:t>
+              <a:t>The x-axis is cookies and y-axis is cups of milk</a:t>
             </a:r>
             <a:endParaRPr lang="en-US" sz="950" dirty="0"/>
           </a:p>
@@ -5664,7 +5664,7 @@
                 <a:ea typeface="Outfit" pitchFamily="34" charset="-122"/>
                 <a:cs typeface="Outfit" pitchFamily="34" charset="-120"/>
               </a:rPr>
-              <a:t>6.AT.3</a:t>
+              <a:t>6.AT.3a</a:t>
             </a:r>
             <a:endParaRPr lang="en-US" sz="900" dirty="0"/>
           </a:p>
@@ -5883,7 +5883,7 @@
                 <a:ea typeface="Hanken Grotesk" pitchFamily="34" charset="-122"/>
                 <a:cs typeface="Hanken Grotesk" pitchFamily="34" charset="-120"/>
               </a:rPr>
-              <a:t>Reveal Math Grade 6  ·  Unit 3  ·  Lesson 3-4</a:t>
+              <a:t>Reveal Math Grade 6  ·  Unit 3  ·  Lesson 3-3</a:t>
             </a:r>
             <a:endParaRPr lang="en-US" sz="750" dirty="0"/>
           </a:p>
@@ -6095,7 +6095,7 @@
                 <a:ea typeface="Hanken Grotesk" pitchFamily="34" charset="-122"/>
                 <a:cs typeface="Hanken Grotesk" pitchFamily="34" charset="-120"/>
               </a:rPr>
-              <a:t>Chef Montoya's soup serves 8 people, but she needs to serve 32.</a:t>
+              <a:t>The recipe uses 2 ounces of sauce for every 1 sundae.</a:t>
             </a:r>
             <a:endParaRPr lang="en-US" sz="1050" dirty="0"/>
           </a:p>
@@ -6193,7 +6193,7 @@
                 <a:ea typeface="Hanken Grotesk" pitchFamily="34" charset="-122"/>
                 <a:cs typeface="Hanken Grotesk" pitchFamily="34" charset="-120"/>
               </a:rPr>
-              <a:t>I find the scale factor: 32 divided by 8 = 4.</a:t>
+              <a:t>I put sundaes on the x-axis and ounces of sauce on the y-axis.</a:t>
             </a:r>
             <a:endParaRPr lang="en-US" sz="1050" dirty="0"/>
           </a:p>
@@ -6291,7 +6291,7 @@
                 <a:ea typeface="Hanken Grotesk" pitchFamily="34" charset="-122"/>
                 <a:cs typeface="Hanken Grotesk" pitchFamily="34" charset="-120"/>
               </a:rPr>
-              <a:t>The recipe uses 3 cups of tomatoes to 2 cups of broth, a 3:2 ratio.</a:t>
+              <a:t>For 1 sundae I need 2 ounces, so I plot the ordered pair (1, 2): right 1, up 2.</a:t>
             </a:r>
             <a:endParaRPr lang="en-US" sz="1050" dirty="0"/>
           </a:p>
@@ -6389,7 +6389,7 @@
                 <a:ea typeface="Hanken Grotesk" pitchFamily="34" charset="-122"/>
                 <a:cs typeface="Hanken Grotesk" pitchFamily="34" charset="-120"/>
               </a:rPr>
-              <a:t>I multiply both by 4: 3 x 4 = 12 cups of tomatoes, and 2 x 4 = 8 cups of broth.</a:t>
+              <a:t>For 2 sundaes I need 4 ounces, so I plot (2, 4): right 2, up 4.</a:t>
             </a:r>
             <a:endParaRPr lang="en-US" sz="1050" dirty="0"/>
           </a:p>
@@ -6487,7 +6487,7 @@
                 <a:ea typeface="Hanken Grotesk" pitchFamily="34" charset="-122"/>
                 <a:cs typeface="Hanken Grotesk" pitchFamily="34" charset="-120"/>
               </a:rPr>
-              <a:t>So 3:2 and 12:8 are equivalent ratios, and the flavor stays the same.</a:t>
+              <a:t>When I connect (1, 2), (2, 4), (3, 6), they form a straight line through the origin (0, 0).</a:t>
             </a:r>
             <a:endParaRPr lang="en-US" sz="1050" dirty="0"/>
           </a:p>
@@ -6958,7 +6958,7 @@
                 <a:ea typeface="Outfit" pitchFamily="34" charset="-122"/>
                 <a:cs typeface="Outfit" pitchFamily="34" charset="-120"/>
               </a:rPr>
-              <a:t>6.AT.3</a:t>
+              <a:t>6.AT.3a</a:t>
             </a:r>
             <a:endParaRPr lang="en-US" sz="900" dirty="0"/>
           </a:p>
@@ -7177,7 +7177,7 @@
                 <a:ea typeface="Hanken Grotesk" pitchFamily="34" charset="-122"/>
                 <a:cs typeface="Hanken Grotesk" pitchFamily="34" charset="-120"/>
               </a:rPr>
-              <a:t>Reveal Math Grade 6  ·  Unit 3  ·  Lesson 3-4</a:t>
+              <a:t>Reveal Math Grade 6  ·  Unit 3  ·  Lesson 3-3</a:t>
             </a:r>
             <a:endParaRPr lang="en-US" sz="750" dirty="0"/>
           </a:p>
@@ -7403,7 +7403,7 @@
                 <a:ea typeface="Hanken Grotesk" pitchFamily="34" charset="-122"/>
                 <a:cs typeface="Hanken Grotesk" pitchFamily="34" charset="-120"/>
               </a:rPr>
-              <a:t>Sketch a model for today's problem. Label it using Ratio and Equivalent ratios.</a:t>
+              <a:t>Sketch a model for today's problem. Label it using Coordinate plane and Ordered pair.</a:t>
             </a:r>
             <a:endParaRPr lang="en-US" sz="1000" dirty="0"/>
           </a:p>
@@ -7551,7 +7551,7 @@
                 <a:ea typeface="Hanken Grotesk" pitchFamily="34" charset="-122"/>
                 <a:cs typeface="Hanken Grotesk" pitchFamily="34" charset="-120"/>
               </a:rPr>
-              <a:t>In 2–3 sentences, explain "Multiply or divide both numbers by the same amount to make an equivalent ratio." in your own words.</a:t>
+              <a:t>In 2–3 sentences, explain "The points from equal ratios form a straight line that passes through the origin (0, 0)." in your own words.</a:t>
             </a:r>
             <a:endParaRPr lang="en-US" sz="1000" dirty="0"/>
           </a:p>
@@ -7847,7 +7847,7 @@
                 <a:ea typeface="Hanken Grotesk" pitchFamily="34" charset="-122"/>
                 <a:cs typeface="Hanken Grotesk" pitchFamily="34" charset="-120"/>
               </a:rPr>
-              <a:t>Write your own problem that uses Ratio, then solve it and make an answer key.</a:t>
+              <a:t>Write your own problem that uses Coordinate plane, then solve it and make an answer key.</a:t>
             </a:r>
             <a:endParaRPr lang="en-US" sz="1000" dirty="0"/>
           </a:p>
@@ -8020,7 +8020,7 @@
                 <a:ea typeface="Outfit" pitchFamily="34" charset="-122"/>
                 <a:cs typeface="Outfit" pitchFamily="34" charset="-120"/>
               </a:rPr>
-              <a:t>6.AT.3</a:t>
+              <a:t>6.AT.3a</a:t>
             </a:r>
             <a:endParaRPr lang="en-US" sz="900" dirty="0"/>
           </a:p>
@@ -8239,7 +8239,7 @@
                 <a:ea typeface="Hanken Grotesk" pitchFamily="34" charset="-122"/>
                 <a:cs typeface="Hanken Grotesk" pitchFamily="34" charset="-120"/>
               </a:rPr>
-              <a:t>Reveal Math Grade 6  ·  Unit 3  ·  Lesson 3-4</a:t>
+              <a:t>Reveal Math Grade 6  ·  Unit 3  ·  Lesson 3-3</a:t>
             </a:r>
             <a:endParaRPr lang="en-US" sz="750" dirty="0"/>
           </a:p>
@@ -8408,7 +8408,7 @@
                 <a:ea typeface="Hanken Grotesk" pitchFamily="34" charset="-122"/>
                 <a:cs typeface="Hanken Grotesk" pitchFamily="34" charset="-120"/>
               </a:rPr>
-              <a:t>Marcus earns $45 for every 3 hours of work. How much does he earn in 8 hours?</a:t>
+              <a:t>Points from a ratio table are plotted at (1, 4), (2, 8), and (3, 12). What is the ratio of y to x for each point?</a:t>
             </a:r>
             <a:endParaRPr lang="en-US" sz="1050" dirty="0"/>
           </a:p>
@@ -8484,7 +8484,7 @@
                 <a:ea typeface="Hanken Grotesk" pitchFamily="34" charset="-122"/>
                 <a:cs typeface="Hanken Grotesk" pitchFamily="34" charset="-120"/>
               </a:rPr>
-              <a:t>Which ratio is equivalent to 2:5?</a:t>
+              <a:t>Two students graph ratio tables. Student A plots (1,2), (2,4), (3,6). Student B plots (1,3), (2,6), (3,9). Whose line is steeper?</a:t>
             </a:r>
             <a:endParaRPr lang="en-US" sz="1050" dirty="0"/>
           </a:p>
@@ -8560,7 +8560,7 @@
                 <a:ea typeface="Hanken Grotesk" pitchFamily="34" charset="-122"/>
                 <a:cs typeface="Hanken Grotesk" pitchFamily="34" charset="-120"/>
               </a:rPr>
-              <a:t>A recipe uses 4 eggs for every 6 cups of flour. Which ratio is equivalent?</a:t>
+              <a:t>A ratio table shows (2, 6), (4, 12), and (6, 18). Which ordered pair comes next if the pattern continues?</a:t>
             </a:r>
             <a:endParaRPr lang="en-US" sz="1050" dirty="0"/>
           </a:p>
@@ -8697,7 +8697,7 @@
                 <a:ea typeface="Hanken Grotesk" pitchFamily="34" charset="-122"/>
                 <a:cs typeface="Hanken Grotesk" pitchFamily="34" charset="-120"/>
               </a:rPr>
-              <a:t>The smoothie shop uses 2 cups of strawberries for every 3 cups of yogurt and needs 15 cups of yogurt. How is this the same as scaling Chef Montoya's soup?</a:t>
+              <a:t>The food truck plots tacos vs. salsa and gets a straight line. What does that graph tell the owner about preparing salsa for ANY number of tacos?</a:t>
             </a:r>
             <a:endParaRPr lang="en-US" sz="1000" dirty="0"/>
           </a:p>
@@ -8985,7 +8985,7 @@
                 <a:ea typeface="Outfit" pitchFamily="34" charset="-122"/>
                 <a:cs typeface="Outfit" pitchFamily="34" charset="-120"/>
               </a:rPr>
-              <a:t>6.AT.3</a:t>
+              <a:t>6.AT.3a</a:t>
             </a:r>
             <a:endParaRPr lang="en-US" sz="900" dirty="0"/>
           </a:p>
@@ -9204,7 +9204,7 @@
                 <a:ea typeface="Hanken Grotesk" pitchFamily="34" charset="-122"/>
                 <a:cs typeface="Hanken Grotesk" pitchFamily="34" charset="-120"/>
               </a:rPr>
-              <a:t>Reveal Math Grade 6  ·  Unit 3  ·  Lesson 3-4</a:t>
+              <a:t>Reveal Math Grade 6  ·  Unit 3  ·  Lesson 3-3</a:t>
             </a:r>
             <a:endParaRPr lang="en-US" sz="750" dirty="0"/>
           </a:p>
@@ -9408,7 +9408,7 @@
                 <a:ea typeface="Hanken Grotesk" pitchFamily="34" charset="-122"/>
                 <a:cs typeface="Hanken Grotesk" pitchFamily="34" charset="-120"/>
               </a:rPr>
-              <a:t>Today's key idea is "Multiply or divide both numbers by the same amount to make an equivalent ratio." — and it works because ___.</a:t>
+              <a:t>Today's key idea is "The points from equal ratios form a straight line that passes through the origin (0, 0)." — and it works because ___.</a:t>
             </a:r>
             <a:endParaRPr lang="en-US" sz="1050" dirty="0"/>
           </a:p>
@@ -9557,7 +9557,7 @@
                 <a:ea typeface="Hanken Grotesk" pitchFamily="34" charset="-122"/>
                 <a:cs typeface="Hanken Grotesk" pitchFamily="34" charset="-120"/>
               </a:rPr>
-              <a:t>Because Ratio means ___, but a tricky part is ___, so I have to ___.</a:t>
+              <a:t>Because Coordinate plane means ___, but a tricky part is ___, so I have to ___.</a:t>
             </a:r>
             <a:endParaRPr lang="en-US" sz="1050" dirty="0"/>
           </a:p>
@@ -9706,7 +9706,7 @@
                 <a:ea typeface="Hanken Grotesk" pitchFamily="34" charset="-122"/>
                 <a:cs typeface="Hanken Grotesk" pitchFamily="34" charset="-120"/>
               </a:rPr>
-              <a:t>A common mistake with Ratio is ___. It happens because ___, and the fix is ___.</a:t>
+              <a:t>A common mistake with Coordinate plane is ___. It happens because ___, and the fix is ___.</a:t>
             </a:r>
             <a:endParaRPr lang="en-US" sz="1050" dirty="0"/>
           </a:p>
@@ -9902,7 +9902,7 @@
                 <a:ea typeface="Outfit" pitchFamily="34" charset="-122"/>
                 <a:cs typeface="Outfit" pitchFamily="34" charset="-120"/>
               </a:rPr>
-              <a:t>6.AT.3</a:t>
+              <a:t>6.AT.3a</a:t>
             </a:r>
             <a:endParaRPr lang="en-US" sz="900" dirty="0"/>
           </a:p>
@@ -10121,7 +10121,7 @@
                 <a:ea typeface="Hanken Grotesk" pitchFamily="34" charset="-122"/>
                 <a:cs typeface="Hanken Grotesk" pitchFamily="34" charset="-120"/>
               </a:rPr>
-              <a:t>Reveal Math Grade 6  ·  Unit 3  ·  Lesson 3-4</a:t>
+              <a:t>Reveal Math Grade 6  ·  Unit 3  ·  Lesson 3-3</a:t>
             </a:r>
             <a:endParaRPr lang="en-US" sz="750" dirty="0"/>
           </a:p>
@@ -10579,7 +10579,7 @@
                 <a:ea typeface="Hanken Grotesk" pitchFamily="34" charset="-122"/>
                 <a:cs typeface="Hanken Grotesk" pitchFamily="34" charset="-120"/>
               </a:rPr>
-              <a:t>A store sells 5 notebooks for $8. At this rate, how much would 15 notebooks cost?</a:t>
+              <a:t>A ratio table shows cups of rice to cups of water: (1, 2), (2, 4), (3, 6). If you plot these points, the line passes through which point?</a:t>
             </a:r>
             <a:endParaRPr lang="en-US" sz="1050" dirty="0"/>
           </a:p>
@@ -10618,7 +10618,7 @@
                 <a:ea typeface="Hanken Grotesk" pitchFamily="34" charset="-122"/>
                 <a:cs typeface="Hanken Grotesk" pitchFamily="34" charset="-120"/>
               </a:rPr>
-              <a:t>A.  $24</a:t>
+              <a:t>A.  (5, 10)</a:t>
             </a:r>
             <a:endParaRPr lang="en-US" sz="1000" dirty="0"/>
           </a:p>
@@ -10657,7 +10657,7 @@
                 <a:ea typeface="Hanken Grotesk" pitchFamily="34" charset="-122"/>
                 <a:cs typeface="Hanken Grotesk" pitchFamily="34" charset="-120"/>
               </a:rPr>
-              <a:t>B.  $18</a:t>
+              <a:t>B.  (4, 6)</a:t>
             </a:r>
             <a:endParaRPr lang="en-US" sz="1000" dirty="0"/>
           </a:p>
@@ -10696,7 +10696,7 @@
                 <a:ea typeface="Hanken Grotesk" pitchFamily="34" charset="-122"/>
                 <a:cs typeface="Hanken Grotesk" pitchFamily="34" charset="-120"/>
               </a:rPr>
-              <a:t>C.  $20</a:t>
+              <a:t>C.  (5, 8)</a:t>
             </a:r>
             <a:endParaRPr lang="en-US" sz="1000" dirty="0"/>
           </a:p>
@@ -10735,7 +10735,7 @@
                 <a:ea typeface="Hanken Grotesk" pitchFamily="34" charset="-122"/>
                 <a:cs typeface="Hanken Grotesk" pitchFamily="34" charset="-120"/>
               </a:rPr>
-              <a:t>D.  $40</a:t>
+              <a:t>D.  (6, 10)</a:t>
             </a:r>
             <a:endParaRPr lang="en-US" sz="1000" dirty="0"/>
           </a:p>
@@ -11030,7 +11030,7 @@
                 <a:ea typeface="Outfit" pitchFamily="34" charset="-122"/>
                 <a:cs typeface="Outfit" pitchFamily="34" charset="-120"/>
               </a:rPr>
-              <a:t>6.AT.3</a:t>
+              <a:t>6.AT.3a</a:t>
             </a:r>
             <a:endParaRPr lang="en-US" sz="900" dirty="0"/>
           </a:p>
@@ -11249,7 +11249,7 @@
                 <a:ea typeface="Hanken Grotesk" pitchFamily="34" charset="-122"/>
                 <a:cs typeface="Hanken Grotesk" pitchFamily="34" charset="-120"/>
               </a:rPr>
-              <a:t>Reveal Math Grade 6  ·  Unit 3  ·  Lesson 3-4</a:t>
+              <a:t>Reveal Math Grade 6  ·  Unit 3  ·  Lesson 3-3</a:t>
             </a:r>
             <a:endParaRPr lang="en-US" sz="750" dirty="0"/>
           </a:p>
@@ -11363,7 +11363,7 @@
                 <a:ea typeface="Hanken Grotesk" pitchFamily="34" charset="-122"/>
                 <a:cs typeface="Hanken Grotesk" pitchFamily="34" charset="-120"/>
               </a:rPr>
-              <a:t>I can find and check equivalent ratios using multiplication and division.</a:t>
+              <a:t>I can graph the values from a ratio table as points on the coordinate plane.</a:t>
             </a:r>
             <a:endParaRPr lang="en-US" sz="1100" dirty="0"/>
           </a:p>
@@ -12463,7 +12463,7 @@
                 <a:ea typeface="Outfit" pitchFamily="34" charset="-122"/>
                 <a:cs typeface="Outfit" pitchFamily="34" charset="-120"/>
               </a:rPr>
-              <a:t>6.AT.3</a:t>
+              <a:t>6.AT.3a</a:t>
             </a:r>
             <a:endParaRPr lang="en-US" sz="900" dirty="0"/>
           </a:p>
@@ -12682,7 +12682,7 @@
                 <a:ea typeface="Hanken Grotesk" pitchFamily="34" charset="-122"/>
                 <a:cs typeface="Hanken Grotesk" pitchFamily="34" charset="-120"/>
               </a:rPr>
-              <a:t>Reveal Math Grade 6  ·  Unit 3  ·  Lesson 3-4</a:t>
+              <a:t>Reveal Math Grade 6  ·  Unit 3  ·  Lesson 3-3</a:t>
             </a:r>
             <a:endParaRPr lang="en-US" sz="750" dirty="0"/>
           </a:p>
@@ -12932,7 +12932,7 @@
                 <a:ea typeface="Hanken Grotesk" pitchFamily="34" charset="-122"/>
                 <a:cs typeface="Hanken Grotesk" pitchFamily="34" charset="-120"/>
               </a:rPr>
-              <a:t>I can find and check equivalent ratios using multiplication and division.</a:t>
+              <a:t>I can graph the values from a ratio table as points on the coordinate plane.</a:t>
             </a:r>
             <a:endParaRPr lang="en-US" sz="1800" dirty="0"/>
           </a:p>
@@ -13104,7 +13104,7 @@
                 <a:ea typeface="Hanken Grotesk" pitchFamily="34" charset="-122"/>
                 <a:cs typeface="Hanken Grotesk" pitchFamily="34" charset="-120"/>
               </a:rPr>
-              <a:t>I can explain my reasoning using the words equivalent ratios, rate, proportion, and simplify.</a:t>
+              <a:t>I can explain my graph using the words coordinate plane, ordered pair, origin, and proportional.</a:t>
             </a:r>
             <a:endParaRPr lang="en-US" sz="1700" dirty="0"/>
           </a:p>
@@ -13277,7 +13277,7 @@
                 <a:ea typeface="Outfit" pitchFamily="34" charset="-122"/>
                 <a:cs typeface="Outfit" pitchFamily="34" charset="-120"/>
               </a:rPr>
-              <a:t>6.AT.3</a:t>
+              <a:t>6.AT.3a</a:t>
             </a:r>
             <a:endParaRPr lang="en-US" sz="900" dirty="0"/>
           </a:p>
@@ -13496,7 +13496,7 @@
                 <a:ea typeface="Hanken Grotesk" pitchFamily="34" charset="-122"/>
                 <a:cs typeface="Hanken Grotesk" pitchFamily="34" charset="-120"/>
               </a:rPr>
-              <a:t>Reveal Math Grade 6  ·  Unit 3  ·  Lesson 3-4</a:t>
+              <a:t>Reveal Math Grade 6  ·  Unit 3  ·  Lesson 3-3</a:t>
             </a:r>
             <a:endParaRPr lang="en-US" sz="750" dirty="0"/>
           </a:p>
@@ -13693,7 +13693,7 @@
                 <a:ea typeface="Hanken Grotesk" pitchFamily="34" charset="-122"/>
                 <a:cs typeface="Hanken Grotesk" pitchFamily="34" charset="-120"/>
               </a:rPr>
-              <a:t>Chef Montoya's soup serves 8 people, but she needs to serve 32. How many times bigger is the recipe, and what must she do to BOTH ingredients to keep the flavor?</a:t>
+              <a:t>The sundae recipe uses 2 ounces of chocolate sauce for every 1 sundae. Before you graph, what do you predict the points will look like, and which quantity goes on each axis?</a:t>
             </a:r>
             <a:endParaRPr lang="en-US" sz="1400" dirty="0"/>
           </a:p>
@@ -14023,7 +14023,7 @@
                 <a:ea typeface="Hanken Grotesk" pitchFamily="34" charset="-122"/>
                 <a:cs typeface="Hanken Grotesk" pitchFamily="34" charset="-120"/>
               </a:rPr>
-              <a:t>Equivalent ratios</a:t>
+              <a:t>Coordinate plane</a:t>
             </a:r>
             <a:endParaRPr lang="en-US" sz="900" dirty="0"/>
           </a:p>
@@ -14070,7 +14070,7 @@
                 <a:ea typeface="Hanken Grotesk" pitchFamily="34" charset="-122"/>
                 <a:cs typeface="Hanken Grotesk" pitchFamily="34" charset="-120"/>
               </a:rPr>
-              <a:t>Proportion</a:t>
+              <a:t>Ordered pair</a:t>
             </a:r>
             <a:endParaRPr lang="en-US" sz="900" dirty="0"/>
           </a:p>
@@ -14117,7 +14117,7 @@
                 <a:ea typeface="Hanken Grotesk" pitchFamily="34" charset="-122"/>
                 <a:cs typeface="Hanken Grotesk" pitchFamily="34" charset="-120"/>
               </a:rPr>
-              <a:t>Rate</a:t>
+              <a:t>Origin</a:t>
             </a:r>
             <a:endParaRPr lang="en-US" sz="900" dirty="0"/>
           </a:p>
@@ -14290,7 +14290,7 @@
                 <a:ea typeface="Outfit" pitchFamily="34" charset="-122"/>
                 <a:cs typeface="Outfit" pitchFamily="34" charset="-120"/>
               </a:rPr>
-              <a:t>6.AT.3</a:t>
+              <a:t>6.AT.3a</a:t>
             </a:r>
             <a:endParaRPr lang="en-US" sz="900" dirty="0"/>
           </a:p>
@@ -14509,7 +14509,7 @@
                 <a:ea typeface="Hanken Grotesk" pitchFamily="34" charset="-122"/>
                 <a:cs typeface="Hanken Grotesk" pitchFamily="34" charset="-120"/>
               </a:rPr>
-              <a:t>Reveal Math Grade 6  ·  Unit 3  ·  Lesson 3-4</a:t>
+              <a:t>Reveal Math Grade 6  ·  Unit 3  ·  Lesson 3-3</a:t>
             </a:r>
             <a:endParaRPr lang="en-US" sz="750" dirty="0"/>
           </a:p>
@@ -14706,7 +14706,7 @@
                 <a:ea typeface="Hanken Grotesk" pitchFamily="34" charset="-122"/>
                 <a:cs typeface="Hanken Grotesk" pitchFamily="34" charset="-120"/>
               </a:rPr>
-              <a:t>Looking at the tomatoes-to-broth table (3:2, 6:4, 9:6, 12:8), how can you PROVE these ratios are all equivalent?</a:t>
+              <a:t>After plotting (1,2), (2,4), (3,6)... what pattern do you notice, and how does it show the chocolate-sauce ratio?</a:t>
             </a:r>
             <a:endParaRPr lang="en-US" sz="1400" dirty="0"/>
           </a:p>
@@ -15036,7 +15036,7 @@
                 <a:ea typeface="Hanken Grotesk" pitchFamily="34" charset="-122"/>
                 <a:cs typeface="Hanken Grotesk" pitchFamily="34" charset="-120"/>
               </a:rPr>
-              <a:t>Equivalent ratios</a:t>
+              <a:t>Coordinate plane</a:t>
             </a:r>
             <a:endParaRPr lang="en-US" sz="900" dirty="0"/>
           </a:p>
@@ -15083,7 +15083,7 @@
                 <a:ea typeface="Hanken Grotesk" pitchFamily="34" charset="-122"/>
                 <a:cs typeface="Hanken Grotesk" pitchFamily="34" charset="-120"/>
               </a:rPr>
-              <a:t>Simplify</a:t>
+              <a:t>Ordered pair</a:t>
             </a:r>
             <a:endParaRPr lang="en-US" sz="900" dirty="0"/>
           </a:p>
@@ -15130,7 +15130,7 @@
                 <a:ea typeface="Hanken Grotesk" pitchFamily="34" charset="-122"/>
                 <a:cs typeface="Hanken Grotesk" pitchFamily="34" charset="-120"/>
               </a:rPr>
-              <a:t>Proportion</a:t>
+              <a:t>Linear pattern</a:t>
             </a:r>
             <a:endParaRPr lang="en-US" sz="900" dirty="0"/>
           </a:p>
@@ -15177,7 +15177,54 @@
                 <a:ea typeface="Hanken Grotesk" pitchFamily="34" charset="-122"/>
                 <a:cs typeface="Hanken Grotesk" pitchFamily="34" charset="-120"/>
               </a:rPr>
-              <a:t>Rate</a:t>
+              <a:t>Proportional</a:t>
+            </a:r>
+            <a:endParaRPr lang="en-US" sz="900" dirty="0"/>
+          </a:p>
+        </p:txBody>
+      </p:sp>
+      <p:sp>
+        <p:nvSpPr>
+          <p:cNvPr id="32" name="Text 30"/>
+          <p:cNvSpPr/>
+          <p:nvPr/>
+        </p:nvSpPr>
+        <p:spPr>
+          <a:xfrm>
+            <a:off x="6263640" y="3666744"/>
+            <a:ext cx="1120140" cy="329184"/>
+          </a:xfrm>
+          <a:prstGeom prst="roundRect">
+            <a:avLst>
+              <a:gd name="adj" fmla="val 13889"/>
+            </a:avLst>
+          </a:prstGeom>
+          <a:solidFill>
+            <a:srgbClr val="FFFFFF"/>
+          </a:solidFill>
+          <a:ln w="12700">
+            <a:solidFill>
+              <a:srgbClr val="D6DBDF"/>
+            </a:solidFill>
+          </a:ln>
+        </p:spPr>
+        <p:txBody>
+          <a:bodyPr wrap="square" rtlCol="0" anchor="ctr"/>
+          <a:lstStyle/>
+          <a:p>
+            <a:pPr algn="ctr" indent="0" marL="0">
+              <a:buNone/>
+            </a:pPr>
+            <a:r>
+              <a:rPr lang="en-US" sz="900" b="1" dirty="0">
+                <a:solidFill>
+                  <a:srgbClr val="17324D"/>
+                </a:solidFill>
+                <a:latin typeface="Hanken Grotesk" pitchFamily="34" charset="0"/>
+                <a:ea typeface="Hanken Grotesk" pitchFamily="34" charset="-122"/>
+                <a:cs typeface="Hanken Grotesk" pitchFamily="34" charset="-120"/>
+              </a:rPr>
+              <a:t>Origin</a:t>
             </a:r>
             <a:endParaRPr lang="en-US" sz="900" dirty="0"/>
           </a:p>
@@ -15350,7 +15397,7 @@
                 <a:ea typeface="Outfit" pitchFamily="34" charset="-122"/>
                 <a:cs typeface="Outfit" pitchFamily="34" charset="-120"/>
               </a:rPr>
-              <a:t>6.AT.3</a:t>
+              <a:t>6.AT.3a</a:t>
             </a:r>
             <a:endParaRPr lang="en-US" sz="900" dirty="0"/>
           </a:p>
@@ -15569,7 +15616,7 @@
                 <a:ea typeface="Hanken Grotesk" pitchFamily="34" charset="-122"/>
                 <a:cs typeface="Hanken Grotesk" pitchFamily="34" charset="-120"/>
               </a:rPr>
-              <a:t>Reveal Math Grade 6  ·  Unit 3  ·  Lesson 3-4</a:t>
+              <a:t>Reveal Math Grade 6  ·  Unit 3  ·  Lesson 3-3</a:t>
             </a:r>
             <a:endParaRPr lang="en-US" sz="750" dirty="0"/>
           </a:p>
@@ -15766,7 +15813,7 @@
                 <a:ea typeface="Hanken Grotesk" pitchFamily="34" charset="-122"/>
                 <a:cs typeface="Hanken Grotesk" pitchFamily="34" charset="-120"/>
               </a:rPr>
-              <a:t>The smoothie shop uses 2 cups of strawberries for every 3 cups of yogurt and needs 15 cups of yogurt. How is this the same as scaling Chef Montoya's soup?</a:t>
+              <a:t>The food truck plots tacos vs. salsa and gets a straight line. What does that graph tell the owner about preparing salsa for ANY number of tacos?</a:t>
             </a:r>
             <a:endParaRPr lang="en-US" sz="1400" dirty="0"/>
           </a:p>
@@ -16096,7 +16143,7 @@
                 <a:ea typeface="Hanken Grotesk" pitchFamily="34" charset="-122"/>
                 <a:cs typeface="Hanken Grotesk" pitchFamily="34" charset="-120"/>
               </a:rPr>
-              <a:t>Equivalent ratios</a:t>
+              <a:t>Coordinate plane</a:t>
             </a:r>
             <a:endParaRPr lang="en-US" sz="900" dirty="0"/>
           </a:p>
@@ -16143,7 +16190,7 @@
                 <a:ea typeface="Hanken Grotesk" pitchFamily="34" charset="-122"/>
                 <a:cs typeface="Hanken Grotesk" pitchFamily="34" charset="-120"/>
               </a:rPr>
-              <a:t>Proportion</a:t>
+              <a:t>Ordered pair</a:t>
             </a:r>
             <a:endParaRPr lang="en-US" sz="900" dirty="0"/>
           </a:p>
@@ -16190,7 +16237,7 @@
                 <a:ea typeface="Hanken Grotesk" pitchFamily="34" charset="-122"/>
                 <a:cs typeface="Hanken Grotesk" pitchFamily="34" charset="-120"/>
               </a:rPr>
-              <a:t>Simplify</a:t>
+              <a:t>Proportional</a:t>
             </a:r>
             <a:endParaRPr lang="en-US" sz="900" dirty="0"/>
           </a:p>
@@ -16237,7 +16284,7 @@
                 <a:ea typeface="Hanken Grotesk" pitchFamily="34" charset="-122"/>
                 <a:cs typeface="Hanken Grotesk" pitchFamily="34" charset="-120"/>
               </a:rPr>
-              <a:t>Rate</a:t>
+              <a:t>Origin</a:t>
             </a:r>
             <a:endParaRPr lang="en-US" sz="900" dirty="0"/>
           </a:p>
@@ -16410,7 +16457,7 @@
                 <a:ea typeface="Outfit" pitchFamily="34" charset="-122"/>
                 <a:cs typeface="Outfit" pitchFamily="34" charset="-120"/>
               </a:rPr>
-              <a:t>6.AT.3</a:t>
+              <a:t>6.AT.3a</a:t>
             </a:r>
             <a:endParaRPr lang="en-US" sz="900" dirty="0"/>
           </a:p>
@@ -16629,7 +16676,7 @@
                 <a:ea typeface="Hanken Grotesk" pitchFamily="34" charset="-122"/>
                 <a:cs typeface="Hanken Grotesk" pitchFamily="34" charset="-120"/>
               </a:rPr>
-              <a:t>Reveal Math Grade 6  ·  Unit 3  ·  Lesson 3-4</a:t>
+              <a:t>Reveal Math Grade 6  ·  Unit 3  ·  Lesson 3-3</a:t>
             </a:r>
             <a:endParaRPr lang="en-US" sz="750" dirty="0"/>
           </a:p>
@@ -16826,7 +16873,7 @@
                 <a:ea typeface="Hanken Grotesk" pitchFamily="34" charset="-122"/>
                 <a:cs typeface="Hanken Grotesk" pitchFamily="34" charset="-120"/>
               </a:rPr>
-              <a:t>During practice on Equivalent Ratios, what strategy did you use when a problem felt tricky?</a:t>
+              <a:t>During practice on Graph Ratio Tables, what strategy did you use when a problem felt tricky?</a:t>
             </a:r>
             <a:endParaRPr lang="en-US" sz="1400" dirty="0"/>
           </a:p>
@@ -17156,7 +17203,7 @@
                 <a:ea typeface="Hanken Grotesk" pitchFamily="34" charset="-122"/>
                 <a:cs typeface="Hanken Grotesk" pitchFamily="34" charset="-120"/>
               </a:rPr>
-              <a:t>Ratio</a:t>
+              <a:t>Coordinate plane</a:t>
             </a:r>
             <a:endParaRPr lang="en-US" sz="900" dirty="0"/>
           </a:p>
@@ -17203,7 +17250,7 @@
                 <a:ea typeface="Hanken Grotesk" pitchFamily="34" charset="-122"/>
                 <a:cs typeface="Hanken Grotesk" pitchFamily="34" charset="-120"/>
               </a:rPr>
-              <a:t>Equivalent ratios</a:t>
+              <a:t>Ordered pair</a:t>
             </a:r>
             <a:endParaRPr lang="en-US" sz="900" dirty="0"/>
           </a:p>
@@ -17250,7 +17297,7 @@
                 <a:ea typeface="Hanken Grotesk" pitchFamily="34" charset="-122"/>
                 <a:cs typeface="Hanken Grotesk" pitchFamily="34" charset="-120"/>
               </a:rPr>
-              <a:t>Rate</a:t>
+              <a:t>Linear pattern</a:t>
             </a:r>
             <a:endParaRPr lang="en-US" sz="900" dirty="0"/>
           </a:p>
@@ -17297,7 +17344,7 @@
                 <a:ea typeface="Hanken Grotesk" pitchFamily="34" charset="-122"/>
                 <a:cs typeface="Hanken Grotesk" pitchFamily="34" charset="-120"/>
               </a:rPr>
-              <a:t>Proportion</a:t>
+              <a:t>Proportional</a:t>
             </a:r>
             <a:endParaRPr lang="en-US" sz="900" dirty="0"/>
           </a:p>
@@ -17470,7 +17517,7 @@
                 <a:ea typeface="Outfit" pitchFamily="34" charset="-122"/>
                 <a:cs typeface="Outfit" pitchFamily="34" charset="-120"/>
               </a:rPr>
-              <a:t>6.AT.3</a:t>
+              <a:t>6.AT.3a</a:t>
             </a:r>
             <a:endParaRPr lang="en-US" sz="900" dirty="0"/>
           </a:p>
@@ -17689,7 +17736,7 @@
                 <a:ea typeface="Hanken Grotesk" pitchFamily="34" charset="-122"/>
                 <a:cs typeface="Hanken Grotesk" pitchFamily="34" charset="-120"/>
               </a:rPr>
-              <a:t>Reveal Math Grade 6  ·  Unit 3  ·  Lesson 3-4</a:t>
+              <a:t>Reveal Math Grade 6  ·  Unit 3  ·  Lesson 3-3</a:t>
             </a:r>
             <a:endParaRPr lang="en-US" sz="750" dirty="0"/>
           </a:p>
@@ -17883,7 +17930,7 @@
                 <a:ea typeface="Hanken Grotesk" pitchFamily="34" charset="-122"/>
                 <a:cs typeface="Hanken Grotesk" pitchFamily="34" charset="-120"/>
               </a:rPr>
-              <a:t>Chef Montoya is preparing her famous tomato soup for a school banquet. Her original recipe serves 8 people, but tonight she needs to serve 32 guests. She needs your help to scale the recipe without changing the flavor!</a:t>
+              <a:t>Chef Academy students are tracking how much chocolate sauce they need for different numbers of sundaes. They know the recipe uses 2 ounces of sauce for every 1 sundae. Chef Reyes challenges them to plot the ratio table values on a coordinate grid to see the pattern. Will the points form a straight line?</a:t>
             </a:r>
             <a:endParaRPr lang="en-US" sz="1150" dirty="0"/>
           </a:p>
@@ -18108,7 +18155,7 @@
                 <a:ea typeface="Hanken Grotesk" pitchFamily="34" charset="-122"/>
                 <a:cs typeface="Hanken Grotesk" pitchFamily="34" charset="-120"/>
               </a:rPr>
-              <a:t>•  What quantities are being compared in the recipe?</a:t>
+              <a:t>•  What two quantities could we put on the x-axis and y-axis?</a:t>
             </a:r>
             <a:endParaRPr lang="en-US" sz="1000" dirty="0"/>
           </a:p>
@@ -18128,7 +18175,7 @@
                 <a:ea typeface="Hanken Grotesk" pitchFamily="34" charset="-122"/>
                 <a:cs typeface="Hanken Grotesk" pitchFamily="34" charset="-120"/>
               </a:rPr>
-              <a:t>•  What stays the same when you multiply both ingredients by the same number?</a:t>
+              <a:t>•  What pattern do you see in the ratio table values?</a:t>
             </a:r>
             <a:endParaRPr lang="en-US" sz="1000" dirty="0"/>
           </a:p>
@@ -18148,7 +18195,7 @@
                 <a:ea typeface="Hanken Grotesk" pitchFamily="34" charset="-122"/>
                 <a:cs typeface="Hanken Grotesk" pitchFamily="34" charset="-120"/>
               </a:rPr>
-              <a:t>•  How many times bigger is 32 than 8?</a:t>
+              <a:t>•  What do you think the graph will look like?</a:t>
             </a:r>
             <a:endParaRPr lang="en-US" sz="1000" dirty="0"/>
           </a:p>
@@ -18265,7 +18312,7 @@
                 <a:ea typeface="Hanken Grotesk" pitchFamily="34" charset="-122"/>
                 <a:cs typeface="Hanken Grotesk" pitchFamily="34" charset="-120"/>
               </a:rPr>
-              <a:t>•  What if we needed to scale DOWN for just 4 people?</a:t>
+              <a:t>•  What if the points did NOT form a straight line — what would that mean?</a:t>
             </a:r>
             <a:endParaRPr lang="en-US" sz="1000" dirty="0"/>
           </a:p>
@@ -18285,7 +18332,7 @@
                 <a:ea typeface="Hanken Grotesk" pitchFamily="34" charset="-122"/>
                 <a:cs typeface="Hanken Grotesk" pitchFamily="34" charset="-120"/>
               </a:rPr>
-              <a:t>•  Could we use this same thinking with other recipes?</a:t>
+              <a:t>•  Could we use the graph to predict amounts not in our table?</a:t>
             </a:r>
             <a:endParaRPr lang="en-US" sz="1000" dirty="0"/>
           </a:p>
@@ -18458,7 +18505,7 @@
                 <a:ea typeface="Outfit" pitchFamily="34" charset="-122"/>
                 <a:cs typeface="Outfit" pitchFamily="34" charset="-120"/>
               </a:rPr>
-              <a:t>6.AT.3</a:t>
+              <a:t>6.AT.3a</a:t>
             </a:r>
             <a:endParaRPr lang="en-US" sz="900" dirty="0"/>
           </a:p>
@@ -18677,7 +18724,7 @@
                 <a:ea typeface="Hanken Grotesk" pitchFamily="34" charset="-122"/>
                 <a:cs typeface="Hanken Grotesk" pitchFamily="34" charset="-120"/>
               </a:rPr>
-              <a:t>Reveal Math Grade 6  ·  Unit 3  ·  Lesson 3-4</a:t>
+              <a:t>Reveal Math Grade 6  ·  Unit 3  ·  Lesson 3-3</a:t>
             </a:r>
             <a:endParaRPr lang="en-US" sz="750" dirty="0"/>
           </a:p>
@@ -18973,7 +19020,7 @@
                           <a:ea typeface="Hanken Grotesk" pitchFamily="34" charset="-122"/>
                           <a:cs typeface="Hanken Grotesk" pitchFamily="34" charset="-120"/>
                         </a:rPr>
-                        <a:t>Ratio</a:t>
+                        <a:t>Coordinate plane</a:t>
                       </a:r>
                       <a:pPr indent="0" marL="0">
                         <a:buNone/>
@@ -18997,7 +19044,7 @@
                           <a:ea typeface="Hanken Grotesk" pitchFamily="34" charset="-122"/>
                           <a:cs typeface="Hanken Grotesk" pitchFamily="34" charset="-120"/>
                         </a:rPr>
-                        <a:t>Razón</a:t>
+                        <a:t>Plano cartesiano</a:t>
                       </a:r>
                       <a:endParaRPr lang="en-US" sz="950" dirty="0">
                         <a:latin typeface="Hanken Grotesk" charset="0"/>
@@ -19065,7 +19112,7 @@
                           <a:ea typeface="Hanken Grotesk" pitchFamily="34" charset="-122"/>
                           <a:cs typeface="Hanken Grotesk" pitchFamily="34" charset="-120"/>
                         </a:rPr>
-                        <a:t>A way to compare two amounts.</a:t>
+                        <a:t>A grid with a line going across and a line going up to plot points.</a:t>
                       </a:r>
                       <a:pPr indent="0" marL="0">
                         <a:buNone/>
@@ -19089,7 +19136,7 @@
                           <a:ea typeface="Hanken Grotesk" pitchFamily="34" charset="-122"/>
                           <a:cs typeface="Hanken Grotesk" pitchFamily="34" charset="-120"/>
                         </a:rPr>
-                        <a:t>Una manera de comparar dos cantidades.</a:t>
+                        <a:t>Una cuadrícula con una línea horizontal y una vertical para marcar puntos.</a:t>
                       </a:r>
                       <a:endParaRPr lang="en-US" sz="900" dirty="0">
                         <a:latin typeface="Hanken Grotesk" charset="0"/>
@@ -19157,7 +19204,7 @@
                           <a:ea typeface="Hanken Grotesk" pitchFamily="34" charset="-122"/>
                           <a:cs typeface="Hanken Grotesk" pitchFamily="34" charset="-120"/>
                         </a:rPr>
-                        <a:t>3 red apples : 5 green apples</a:t>
+                        <a:t>A + shape made by two number lines crossing at the center point (0, 0)</a:t>
                       </a:r>
                       <a:endParaRPr lang="en-US" sz="900" dirty="0">
                         <a:latin typeface="Hanken Grotesk" charset="0"/>
@@ -19227,7 +19274,7 @@
                           <a:ea typeface="Hanken Grotesk" pitchFamily="34" charset="-122"/>
                           <a:cs typeface="Hanken Grotesk" pitchFamily="34" charset="-120"/>
                         </a:rPr>
-                        <a:t>Equivalent ratios</a:t>
+                        <a:t>Ordered pair</a:t>
                       </a:r>
                       <a:pPr indent="0" marL="0">
                         <a:buNone/>
@@ -19251,7 +19298,7 @@
                           <a:ea typeface="Hanken Grotesk" pitchFamily="34" charset="-122"/>
                           <a:cs typeface="Hanken Grotesk" pitchFamily="34" charset="-120"/>
                         </a:rPr>
-                        <a:t>Razones equivalentes</a:t>
+                        <a:t>Par ordenado</a:t>
                       </a:r>
                       <a:endParaRPr lang="en-US" sz="950" dirty="0">
                         <a:latin typeface="Hanken Grotesk" charset="0"/>
@@ -19319,7 +19366,7 @@
                           <a:ea typeface="Hanken Grotesk" pitchFamily="34" charset="-122"/>
                           <a:cs typeface="Hanken Grotesk" pitchFamily="34" charset="-120"/>
                         </a:rPr>
-                        <a:t>Two ratios that mean the same thing.</a:t>
+                        <a:t>Two numbers (x, y) that tell where a point is on a grid.</a:t>
                       </a:r>
                       <a:pPr indent="0" marL="0">
                         <a:buNone/>
@@ -19343,7 +19390,7 @@
                           <a:ea typeface="Hanken Grotesk" pitchFamily="34" charset="-122"/>
                           <a:cs typeface="Hanken Grotesk" pitchFamily="34" charset="-120"/>
                         </a:rPr>
-                        <a:t>Dos razones que significan lo mismo.</a:t>
+                        <a:t>Dos números (x, y) que dicen dónde está un punto en una cuadrícula.</a:t>
                       </a:r>
                       <a:endParaRPr lang="en-US" sz="900" dirty="0">
                         <a:latin typeface="Hanken Grotesk" charset="0"/>
@@ -19411,7 +19458,7 @@
                           <a:ea typeface="Hanken Grotesk" pitchFamily="34" charset="-122"/>
                           <a:cs typeface="Hanken Grotesk" pitchFamily="34" charset="-120"/>
                         </a:rPr>
-                        <a:t>2:3 and 4:6 both mean 2 out of every 3, so 2/3 = 4/6</a:t>
+                        <a:t>(3, 6) means go right 3, up 6</a:t>
                       </a:r>
                       <a:endParaRPr lang="en-US" sz="900" dirty="0">
                         <a:latin typeface="Hanken Grotesk" charset="0"/>
@@ -19481,7 +19528,7 @@
                           <a:ea typeface="Hanken Grotesk" pitchFamily="34" charset="-122"/>
                           <a:cs typeface="Hanken Grotesk" pitchFamily="34" charset="-120"/>
                         </a:rPr>
-                        <a:t>Rate</a:t>
+                        <a:t>Linear pattern</a:t>
                       </a:r>
                       <a:pPr indent="0" marL="0">
                         <a:buNone/>
@@ -19505,7 +19552,7 @@
                           <a:ea typeface="Hanken Grotesk" pitchFamily="34" charset="-122"/>
                           <a:cs typeface="Hanken Grotesk" pitchFamily="34" charset="-120"/>
                         </a:rPr>
-                        <a:t>Tasa</a:t>
+                        <a:t>Patrón lineal</a:t>
                       </a:r>
                       <a:endParaRPr lang="en-US" sz="950" dirty="0">
                         <a:latin typeface="Hanken Grotesk" charset="0"/>
@@ -19573,7 +19620,7 @@
                           <a:ea typeface="Hanken Grotesk" pitchFamily="34" charset="-122"/>
                           <a:cs typeface="Hanken Grotesk" pitchFamily="34" charset="-120"/>
                         </a:rPr>
-                        <a:t>A ratio comparing two amounts with different units, like miles per hour.</a:t>
+                        <a:t>Points that make a straight line on a grid.</a:t>
                       </a:r>
                       <a:pPr indent="0" marL="0">
                         <a:buNone/>
@@ -19597,7 +19644,7 @@
                           <a:ea typeface="Hanken Grotesk" pitchFamily="34" charset="-122"/>
                           <a:cs typeface="Hanken Grotesk" pitchFamily="34" charset="-120"/>
                         </a:rPr>
-                        <a:t>Una razón que compara dos cantidades con unidades distintas, como millas por hora.</a:t>
+                        <a:t>Puntos que forman una línea recta en una cuadrícula.</a:t>
                       </a:r>
                       <a:endParaRPr lang="en-US" sz="900" dirty="0">
                         <a:latin typeface="Hanken Grotesk" charset="0"/>
@@ -19665,7 +19712,7 @@
                           <a:ea typeface="Hanken Grotesk" pitchFamily="34" charset="-122"/>
                           <a:cs typeface="Hanken Grotesk" pitchFamily="34" charset="-120"/>
                         </a:rPr>
-                        <a:t>60 miles per 1 hour</a:t>
+                        <a:t>(1,2), (2,4), (3,6) all line up</a:t>
                       </a:r>
                       <a:endParaRPr lang="en-US" sz="900" dirty="0">
                         <a:latin typeface="Hanken Grotesk" charset="0"/>
@@ -19735,7 +19782,7 @@
                           <a:ea typeface="Hanken Grotesk" pitchFamily="34" charset="-122"/>
                           <a:cs typeface="Hanken Grotesk" pitchFamily="34" charset="-120"/>
                         </a:rPr>
-                        <a:t>Proportion</a:t>
+                        <a:t>Proportional</a:t>
                       </a:r>
                       <a:pPr indent="0" marL="0">
                         <a:buNone/>
@@ -19759,7 +19806,7 @@
                           <a:ea typeface="Hanken Grotesk" pitchFamily="34" charset="-122"/>
                           <a:cs typeface="Hanken Grotesk" pitchFamily="34" charset="-120"/>
                         </a:rPr>
-                        <a:t>Proporción</a:t>
+                        <a:t>Proporcional</a:t>
                       </a:r>
                       <a:endParaRPr lang="en-US" sz="950" dirty="0">
                         <a:latin typeface="Hanken Grotesk" charset="0"/>
@@ -19827,7 +19874,7 @@
                           <a:ea typeface="Hanken Grotesk" pitchFamily="34" charset="-122"/>
                           <a:cs typeface="Hanken Grotesk" pitchFamily="34" charset="-120"/>
                         </a:rPr>
-                        <a:t>A math sentence saying two ratios are equal.</a:t>
+                        <a:t>Two amounts that grow together at the same rate.</a:t>
                       </a:r>
                       <a:pPr indent="0" marL="0">
                         <a:buNone/>
@@ -19851,7 +19898,7 @@
                           <a:ea typeface="Hanken Grotesk" pitchFamily="34" charset="-122"/>
                           <a:cs typeface="Hanken Grotesk" pitchFamily="34" charset="-120"/>
                         </a:rPr>
-                        <a:t>Una oración matemática que dice que dos razones son iguales.</a:t>
+                        <a:t>Dos cantidades que crecen juntas al mismo ritmo.</a:t>
                       </a:r>
                       <a:endParaRPr lang="en-US" sz="900" dirty="0">
                         <a:latin typeface="Hanken Grotesk" charset="0"/>
@@ -19919,7 +19966,7 @@
                           <a:ea typeface="Hanken Grotesk" pitchFamily="34" charset="-122"/>
                           <a:cs typeface="Hanken Grotesk" pitchFamily="34" charset="-120"/>
                         </a:rPr>
-                        <a:t>2/3 = 4/6</a:t>
+                        <a:t>A straight line from (0,0) through (2,6) and (4,12)</a:t>
                       </a:r>
                       <a:endParaRPr lang="en-US" sz="900" dirty="0">
                         <a:latin typeface="Hanken Grotesk" charset="0"/>
@@ -19989,7 +20036,7 @@
                           <a:ea typeface="Hanken Grotesk" pitchFamily="34" charset="-122"/>
                           <a:cs typeface="Hanken Grotesk" pitchFamily="34" charset="-120"/>
                         </a:rPr>
-                        <a:t>Simplify</a:t>
+                        <a:t>Origin</a:t>
                       </a:r>
                       <a:pPr indent="0" marL="0">
                         <a:buNone/>
@@ -20013,7 +20060,7 @@
                           <a:ea typeface="Hanken Grotesk" pitchFamily="34" charset="-122"/>
                           <a:cs typeface="Hanken Grotesk" pitchFamily="34" charset="-120"/>
                         </a:rPr>
-                        <a:t>Simplificar</a:t>
+                        <a:t>Origen</a:t>
                       </a:r>
                       <a:endParaRPr lang="en-US" sz="950" dirty="0">
                         <a:latin typeface="Hanken Grotesk" charset="0"/>
@@ -20081,7 +20128,7 @@
                           <a:ea typeface="Hanken Grotesk" pitchFamily="34" charset="-122"/>
                           <a:cs typeface="Hanken Grotesk" pitchFamily="34" charset="-120"/>
                         </a:rPr>
-                        <a:t>To make a ratio smaller while keeping the same comparison.</a:t>
+                        <a:t>The point (0, 0) where the two grid lines cross.</a:t>
                       </a:r>
                       <a:pPr indent="0" marL="0">
                         <a:buNone/>
@@ -20105,7 +20152,7 @@
                           <a:ea typeface="Hanken Grotesk" pitchFamily="34" charset="-122"/>
                           <a:cs typeface="Hanken Grotesk" pitchFamily="34" charset="-120"/>
                         </a:rPr>
-                        <a:t>Hacer una razón más pequeña sin cambiar la comparación.</a:t>
+                        <a:t>El punto (0, 0) donde se cruzan las dos líneas de la cuadrícula.</a:t>
                       </a:r>
                       <a:endParaRPr lang="en-US" sz="900" dirty="0">
                         <a:latin typeface="Hanken Grotesk" charset="0"/>
@@ -20173,7 +20220,7 @@
                           <a:ea typeface="Hanken Grotesk" pitchFamily="34" charset="-122"/>
                           <a:cs typeface="Hanken Grotesk" pitchFamily="34" charset="-120"/>
                         </a:rPr>
-                        <a:t>12:18 → divide both by 6 → 2:3</a:t>
+                        <a:t>The starting corner of the grid at (0, 0)</a:t>
                       </a:r>
                       <a:endParaRPr lang="en-US" sz="900" dirty="0">
                         <a:latin typeface="Hanken Grotesk" charset="0"/>
@@ -20396,7 +20443,7 @@
                 <a:ea typeface="Outfit" pitchFamily="34" charset="-122"/>
                 <a:cs typeface="Outfit" pitchFamily="34" charset="-120"/>
               </a:rPr>
-              <a:t>6.AT.3</a:t>
+              <a:t>6.AT.3a</a:t>
             </a:r>
             <a:endParaRPr lang="en-US" sz="900" dirty="0"/>
           </a:p>
@@ -20615,7 +20662,7 @@
                 <a:ea typeface="Hanken Grotesk" pitchFamily="34" charset="-122"/>
                 <a:cs typeface="Hanken Grotesk" pitchFamily="34" charset="-120"/>
               </a:rPr>
-              <a:t>Reveal Math Grade 6  ·  Unit 3  ·  Lesson 3-4</a:t>
+              <a:t>Reveal Math Grade 6  ·  Unit 3  ·  Lesson 3-3</a:t>
             </a:r>
             <a:endParaRPr lang="en-US" sz="750" dirty="0"/>
           </a:p>
@@ -20770,7 +20817,7 @@
                 <a:ea typeface="Outfit" pitchFamily="34" charset="-122"/>
                 <a:cs typeface="Outfit" pitchFamily="34" charset="-120"/>
               </a:rPr>
-              <a:t>What are equivalent ratios?</a:t>
+              <a:t>How do we graph a ratio table?</a:t>
             </a:r>
             <a:endParaRPr lang="en-US" sz="1200" dirty="0"/>
           </a:p>
@@ -20868,7 +20915,7 @@
                 <a:ea typeface="Hanken Grotesk" pitchFamily="34" charset="-122"/>
                 <a:cs typeface="Hanken Grotesk" pitchFamily="34" charset="-120"/>
               </a:rPr>
-              <a:t>A ratio is 2:5. We want to make it bigger using a scale factor of 3.</a:t>
+              <a:t>A recipe uses 1 cup of sugar for every 3 cups of flour.</a:t>
             </a:r>
             <a:endParaRPr lang="en-US" sz="1050" dirty="0"/>
           </a:p>
@@ -20966,7 +21013,7 @@
                 <a:ea typeface="Hanken Grotesk" pitchFamily="34" charset="-122"/>
                 <a:cs typeface="Hanken Grotesk" pitchFamily="34" charset="-120"/>
               </a:rPr>
-              <a:t>Multiply both by 3: 2 x 3 = 6 and 5 x 3 = 15.</a:t>
+              <a:t>For 1 cup of sugar, the ordered pair is (1, 3): right 1, up 3.</a:t>
             </a:r>
             <a:endParaRPr lang="en-US" sz="1050" dirty="0"/>
           </a:p>
@@ -21064,7 +21111,7 @@
                 <a:ea typeface="Hanken Grotesk" pitchFamily="34" charset="-122"/>
                 <a:cs typeface="Hanken Grotesk" pitchFamily="34" charset="-120"/>
               </a:rPr>
-              <a:t>So 2:5 and 6:15 are equivalent ratios.</a:t>
+              <a:t>For 2 cups of sugar, what is the pair? It is (2, 6): right 2, up 6.</a:t>
             </a:r>
             <a:endParaRPr lang="en-US" sz="1050" dirty="0"/>
           </a:p>
@@ -21240,7 +21287,7 @@
                 <a:ea typeface="Hanken Grotesk" pitchFamily="34" charset="-122"/>
                 <a:cs typeface="Hanken Grotesk" pitchFamily="34" charset="-120"/>
               </a:rPr>
-              <a:t>Chef Montoya's soup serves 8 people, but she needs to serve 32. How many times bigger is the recipe, and what must she do to BOTH ingredients to keep the flavor?</a:t>
+              <a:t>The sundae recipe uses 2 ounces of chocolate sauce for every 1 sundae. Before you graph, what do you predict the points will look like, and which quantity goes on each axis?</a:t>
             </a:r>
             <a:endParaRPr lang="en-US" sz="1000" dirty="0"/>
           </a:p>
@@ -21352,7 +21399,7 @@
                 <a:ea typeface="Hanken Grotesk" pitchFamily="34" charset="-122"/>
                 <a:cs typeface="Hanken Grotesk" pitchFamily="34" charset="-120"/>
               </a:rPr>
-              <a:t>Multiply or divide both numbers by the same amount to make an equivalent ratio.</a:t>
+              <a:t>The points from equal ratios form a straight line that passes through the origin (0, 0).</a:t>
             </a:r>
             <a:endParaRPr lang="en-US" sz="950" dirty="0"/>
           </a:p>
